--- a/Intro to Computers/Lesson 03 - Executables and Paths/Executables and Paths.pptx
+++ b/Intro to Computers/Lesson 03 - Executables and Paths/Executables and Paths.pptx
@@ -5,23 +5,24 @@
     <p:sldMasterId id="2147483695" r:id="rId1"/>
   </p:sldMasterIdLst>
   <p:notesMasterIdLst>
-    <p:notesMasterId r:id="rId16"/>
+    <p:notesMasterId r:id="rId17"/>
   </p:notesMasterIdLst>
   <p:sldIdLst>
     <p:sldId id="271" r:id="rId2"/>
-    <p:sldId id="257" r:id="rId3"/>
-    <p:sldId id="258" r:id="rId4"/>
-    <p:sldId id="259" r:id="rId5"/>
-    <p:sldId id="260" r:id="rId6"/>
-    <p:sldId id="262" r:id="rId7"/>
-    <p:sldId id="261" r:id="rId8"/>
-    <p:sldId id="264" r:id="rId9"/>
-    <p:sldId id="270" r:id="rId10"/>
-    <p:sldId id="268" r:id="rId11"/>
-    <p:sldId id="269" r:id="rId12"/>
-    <p:sldId id="265" r:id="rId13"/>
-    <p:sldId id="266" r:id="rId14"/>
-    <p:sldId id="267" r:id="rId15"/>
+    <p:sldId id="272" r:id="rId3"/>
+    <p:sldId id="257" r:id="rId4"/>
+    <p:sldId id="258" r:id="rId5"/>
+    <p:sldId id="259" r:id="rId6"/>
+    <p:sldId id="260" r:id="rId7"/>
+    <p:sldId id="262" r:id="rId8"/>
+    <p:sldId id="261" r:id="rId9"/>
+    <p:sldId id="264" r:id="rId10"/>
+    <p:sldId id="270" r:id="rId11"/>
+    <p:sldId id="268" r:id="rId12"/>
+    <p:sldId id="269" r:id="rId13"/>
+    <p:sldId id="265" r:id="rId14"/>
+    <p:sldId id="266" r:id="rId15"/>
+    <p:sldId id="267" r:id="rId16"/>
   </p:sldIdLst>
   <p:sldSz cx="12192000" cy="6858000"/>
   <p:notesSz cx="6858000" cy="9144000"/>
@@ -210,7 +211,7 @@
           <a:p>
             <a:fld id="{7D2F5B96-EC90-4B10-91AC-E32DA21E81E1}" type="datetimeFigureOut">
               <a:rPr lang="en-US" smtClean="0"/>
-              <a:t>05-May-26</a:t>
+              <a:t>01-Jun-26</a:t>
             </a:fld>
             <a:endParaRPr lang="en-US"/>
           </a:p>
@@ -551,7 +552,7 @@
           <a:p>
             <a:fld id="{BE457D5F-ED05-449E-97D0-205DAB987247}" type="slidenum">
               <a:rPr lang="en-US" smtClean="0"/>
-              <a:t>2</a:t>
+              <a:t>3</a:t>
             </a:fld>
             <a:endParaRPr lang="en-US"/>
           </a:p>
@@ -638,7 +639,7 @@
           <a:p>
             <a:fld id="{BE457D5F-ED05-449E-97D0-205DAB987247}" type="slidenum">
               <a:rPr lang="en-US" smtClean="0"/>
-              <a:t>7</a:t>
+              <a:t>8</a:t>
             </a:fld>
             <a:endParaRPr lang="en-US"/>
           </a:p>
@@ -722,7 +723,7 @@
           <a:p>
             <a:fld id="{BE457D5F-ED05-449E-97D0-205DAB987247}" type="slidenum">
               <a:rPr lang="en-US" smtClean="0"/>
-              <a:t>11</a:t>
+              <a:t>12</a:t>
             </a:fld>
             <a:endParaRPr lang="en-US"/>
           </a:p>
@@ -838,7 +839,7 @@
           <a:p>
             <a:fld id="{BE457D5F-ED05-449E-97D0-205DAB987247}" type="slidenum">
               <a:rPr lang="en-US" smtClean="0"/>
-              <a:t>12</a:t>
+              <a:t>13</a:t>
             </a:fld>
             <a:endParaRPr lang="en-US"/>
           </a:p>
@@ -951,7 +952,7 @@
           <a:p>
             <a:fld id="{BE457D5F-ED05-449E-97D0-205DAB987247}" type="slidenum">
               <a:rPr lang="en-US" smtClean="0"/>
-              <a:t>13</a:t>
+              <a:t>14</a:t>
             </a:fld>
             <a:endParaRPr lang="en-US"/>
           </a:p>
@@ -1018,7 +1019,7 @@
           <a:p>
             <a:fld id="{7A3E0868-4E26-4CDC-8A56-D70E2D8B12FE}" type="datetime3">
               <a:rPr lang="en-US" smtClean="0"/>
-              <a:t>5 May 2026</a:t>
+              <a:t>1 June 2026</a:t>
             </a:fld>
             <a:endParaRPr lang="en-US"/>
           </a:p>
@@ -3595,7 +3596,7 @@
           <a:p>
             <a:fld id="{A7B8021B-6105-4216-96FC-94348F216D0E}" type="datetime3">
               <a:rPr lang="en-US" smtClean="0"/>
-              <a:t>5 May 2026</a:t>
+              <a:t>1 June 2026</a:t>
             </a:fld>
             <a:endParaRPr lang="en-US"/>
           </a:p>
@@ -5293,7 +5294,7 @@
           <a:p>
             <a:fld id="{5D27CFAB-73E6-44A8-B862-B3306344E3F2}" type="datetime3">
               <a:rPr lang="en-US" smtClean="0"/>
-              <a:t>5 May 2026</a:t>
+              <a:t>1 June 2026</a:t>
             </a:fld>
             <a:endParaRPr lang="en-US"/>
           </a:p>
@@ -7084,7 +7085,7 @@
           <a:p>
             <a:fld id="{A9B2E784-A5F5-4301-881B-94AC8DBF9DED}" type="datetime3">
               <a:rPr lang="en-US" smtClean="0"/>
-              <a:t>5 May 2026</a:t>
+              <a:t>1 June 2026</a:t>
             </a:fld>
             <a:endParaRPr lang="en-US"/>
           </a:p>
@@ -7264,7 +7265,7 @@
           <a:p>
             <a:fld id="{18EAB3A5-9E92-4BB9-8F22-9632B4FBEDBA}" type="datetime3">
               <a:rPr lang="en-US" smtClean="0"/>
-              <a:t>5 May 2026</a:t>
+              <a:t>1 June 2026</a:t>
             </a:fld>
             <a:endParaRPr lang="en-US"/>
           </a:p>
@@ -7492,7 +7493,7 @@
           <a:p>
             <a:fld id="{40923810-5FB2-48C9-96CA-1DE2C4773142}" type="datetime3">
               <a:rPr lang="en-US" smtClean="0"/>
-              <a:t>5 May 2026</a:t>
+              <a:t>1 June 2026</a:t>
             </a:fld>
             <a:endParaRPr lang="en-US"/>
           </a:p>
@@ -7783,7 +7784,7 @@
           <a:p>
             <a:fld id="{E50EFF4B-86EB-42FB-93EA-7D8F9CB2466F}" type="datetime3">
               <a:rPr lang="en-US" smtClean="0"/>
-              <a:t>5 May 2026</a:t>
+              <a:t>1 June 2026</a:t>
             </a:fld>
             <a:endParaRPr lang="en-US"/>
           </a:p>
@@ -8396,7 +8397,7 @@
           <a:p>
             <a:fld id="{FB14FC24-E041-45E9-9A72-E5755A86890F}" type="datetime3">
               <a:rPr lang="en-US" smtClean="0"/>
-              <a:t>5 May 2026</a:t>
+              <a:t>1 June 2026</a:t>
             </a:fld>
             <a:endParaRPr lang="en-US"/>
           </a:p>
@@ -9257,7 +9258,7 @@
           <a:p>
             <a:fld id="{98A19125-94A7-4474-858C-FD9C4ABE9DDA}" type="datetime3">
               <a:rPr lang="en-US" smtClean="0"/>
-              <a:t>5 May 2026</a:t>
+              <a:t>1 June 2026</a:t>
             </a:fld>
             <a:endParaRPr lang="en-US"/>
           </a:p>
@@ -10361,7 +10362,7 @@
           <a:p>
             <a:fld id="{3BA0343D-C8D8-43CE-BB79-50DEA219DB07}" type="datetime3">
               <a:rPr lang="en-US" smtClean="0"/>
-              <a:t>5 May 2026</a:t>
+              <a:t>1 June 2026</a:t>
             </a:fld>
             <a:endParaRPr lang="en-US"/>
           </a:p>
@@ -10651,7 +10652,7 @@
           <a:p>
             <a:fld id="{453BD212-0B9F-4987-965F-AC83B2FC354F}" type="datetime3">
               <a:rPr lang="en-US" smtClean="0"/>
-              <a:t>5 May 2026</a:t>
+              <a:t>1 June 2026</a:t>
             </a:fld>
             <a:endParaRPr lang="en-US"/>
           </a:p>
@@ -10895,7 +10896,7 @@
           <a:p>
             <a:fld id="{6DDC931E-8CBE-4A3F-A034-9B6122C6DCDB}" type="datetime3">
               <a:rPr lang="en-US" smtClean="0"/>
-              <a:t>5 May 2026</a:t>
+              <a:t>1 June 2026</a:t>
             </a:fld>
             <a:endParaRPr lang="en-US"/>
           </a:p>
@@ -12678,7 +12679,7 @@
           <a:p>
             <a:fld id="{220AF9C2-5E8A-4308-AE6B-CA9B65007D0E}" type="datetime3">
               <a:rPr lang="en-US" smtClean="0"/>
-              <a:t>5 May 2026</a:t>
+              <a:t>1 June 2026</a:t>
             </a:fld>
             <a:endParaRPr lang="en-US"/>
           </a:p>
@@ -12992,7 +12993,7 @@
           <a:p>
             <a:fld id="{FF31E861-D2AF-431D-860B-DCF67C218052}" type="datetime3">
               <a:rPr lang="en-US" smtClean="0"/>
-              <a:t>5 May 2026</a:t>
+              <a:t>1 June 2026</a:t>
             </a:fld>
             <a:endParaRPr lang="en-US"/>
           </a:p>
@@ -13272,7 +13273,7 @@
           <a:p>
             <a:fld id="{D1DA25B2-AAF1-4C1F-AA38-12D5BFA7D4C8}" type="datetime3">
               <a:rPr lang="en-US" smtClean="0"/>
-              <a:t>5 May 2026</a:t>
+              <a:t>1 June 2026</a:t>
             </a:fld>
             <a:endParaRPr lang="en-US"/>
           </a:p>
@@ -13552,7 +13553,7 @@
           <a:p>
             <a:fld id="{A25C0F39-45D0-48E9-90B3-7FE8FCE561C8}" type="datetime3">
               <a:rPr lang="en-US" smtClean="0"/>
-              <a:t>5 May 2026</a:t>
+              <a:t>1 June 2026</a:t>
             </a:fld>
             <a:endParaRPr lang="en-US"/>
           </a:p>
@@ -14054,7 +14055,7 @@
           <a:p>
             <a:fld id="{9BAF1A3D-92FA-4F24-9781-74AFA516A230}" type="datetime3">
               <a:rPr lang="en-US" smtClean="0"/>
-              <a:t>5 May 2026</a:t>
+              <a:t>1 June 2026</a:t>
             </a:fld>
             <a:endParaRPr lang="en-US"/>
           </a:p>
@@ -14182,7 +14183,7 @@
           <a:p>
             <a:fld id="{5719C672-856D-4617-A693-8FE15749A9B7}" type="datetime3">
               <a:rPr lang="en-US" smtClean="0"/>
-              <a:t>5 May 2026</a:t>
+              <a:t>1 June 2026</a:t>
             </a:fld>
             <a:endParaRPr lang="en-US"/>
           </a:p>
@@ -14318,7 +14319,7 @@
           <a:p>
             <a:fld id="{5F6C764D-A39E-4C03-B161-E0BC66E8883B}" type="datetime3">
               <a:rPr lang="en-US" smtClean="0"/>
-              <a:t>5 May 2026</a:t>
+              <a:t>1 June 2026</a:t>
             </a:fld>
             <a:endParaRPr lang="en-US"/>
           </a:p>
@@ -14557,7 +14558,7 @@
           <a:p>
             <a:fld id="{6E3E33F9-20B7-4995-BE7D-165DBB597850}" type="datetime3">
               <a:rPr lang="en-US" smtClean="0"/>
-              <a:t>5 May 2026</a:t>
+              <a:t>1 June 2026</a:t>
             </a:fld>
             <a:endParaRPr lang="en-US"/>
           </a:p>
@@ -14671,7 +14672,7 @@
           <a:p>
             <a:fld id="{CD41C263-3501-4369-A962-62B6BF915CDE}" type="datetime3">
               <a:rPr lang="en-US" smtClean="0"/>
-              <a:t>5 May 2026</a:t>
+              <a:t>1 June 2026</a:t>
             </a:fld>
             <a:endParaRPr lang="en-US"/>
           </a:p>
@@ -15075,7 +15076,7 @@
           <a:p>
             <a:fld id="{B06F3EBE-B2E8-4992-9F00-9E4B44F057C0}" type="datetime3">
               <a:rPr lang="en-US" smtClean="0"/>
-              <a:t>5 May 2026</a:t>
+              <a:t>1 June 2026</a:t>
             </a:fld>
             <a:endParaRPr lang="en-US"/>
           </a:p>
@@ -15208,7 +15209,7 @@
           <a:p>
             <a:fld id="{D41656AB-D2E1-472E-8B95-0DF5C6E1D623}" type="datetime3">
               <a:rPr lang="en-US" smtClean="0"/>
-              <a:t>5 May 2026</a:t>
+              <a:t>1 June 2026</a:t>
             </a:fld>
             <a:endParaRPr lang="en-US"/>
           </a:p>
@@ -17185,7 +17186,7 @@
           <a:p>
             <a:fld id="{AD3160A9-B1E4-4AE8-B854-46ED2C2068C2}" type="datetimeFigureOut">
               <a:rPr lang="en-US" smtClean="0"/>
-              <a:t>05-May-26</a:t>
+              <a:t>01-Jun-26</a:t>
             </a:fld>
             <a:endParaRPr lang="en-US"/>
           </a:p>
@@ -17597,7 +17598,7 @@
           <a:p>
             <a:fld id="{AD3160A9-B1E4-4AE8-B854-46ED2C2068C2}" type="datetimeFigureOut">
               <a:rPr lang="en-US" smtClean="0"/>
-              <a:t>05-May-26</a:t>
+              <a:t>01-Jun-26</a:t>
             </a:fld>
             <a:endParaRPr lang="en-US"/>
           </a:p>
@@ -17872,7 +17873,7 @@
           <a:p>
             <a:fld id="{AD3160A9-B1E4-4AE8-B854-46ED2C2068C2}" type="datetimeFigureOut">
               <a:rPr lang="en-US" smtClean="0"/>
-              <a:t>05-May-26</a:t>
+              <a:t>01-Jun-26</a:t>
             </a:fld>
             <a:endParaRPr lang="en-US"/>
           </a:p>
@@ -18068,7 +18069,7 @@
           <a:p>
             <a:fld id="{AD622D1A-DF83-41A8-85FF-04D90BF831D3}" type="datetime3">
               <a:rPr lang="en-US" smtClean="0"/>
-              <a:t>5 May 2026</a:t>
+              <a:t>1 June 2026</a:t>
             </a:fld>
             <a:endParaRPr lang="en-US"/>
           </a:p>
@@ -18319,7 +18320,7 @@
           <a:p>
             <a:fld id="{334F72C3-CDF3-44A8-B602-1649B1728485}" type="datetime3">
               <a:rPr lang="en-US" smtClean="0"/>
-              <a:t>5 May 2026</a:t>
+              <a:t>1 June 2026</a:t>
             </a:fld>
             <a:endParaRPr lang="en-US"/>
           </a:p>
@@ -18627,7 +18628,7 @@
           <a:p>
             <a:fld id="{1E0132BA-B5E7-4FFD-AF6C-169169D47D4A}" type="datetime3">
               <a:rPr lang="en-US" smtClean="0"/>
-              <a:t>5 May 2026</a:t>
+              <a:t>1 June 2026</a:t>
             </a:fld>
             <a:endParaRPr lang="en-US"/>
           </a:p>
@@ -19109,7 +19110,7 @@
           <a:p>
             <a:fld id="{81A30091-1C2A-4151-8D3C-D1E47A72615F}" type="datetime3">
               <a:rPr lang="en-US" smtClean="0"/>
-              <a:t>5 May 2026</a:t>
+              <a:t>1 June 2026</a:t>
             </a:fld>
             <a:endParaRPr lang="en-US"/>
           </a:p>
@@ -19747,7 +19748,7 @@
           <a:p>
             <a:fld id="{35D703CE-07B4-4C05-A488-B4566700621F}" type="datetime3">
               <a:rPr lang="en-US" smtClean="0"/>
-              <a:t>5 May 2026</a:t>
+              <a:t>1 June 2026</a:t>
             </a:fld>
             <a:endParaRPr lang="en-US"/>
           </a:p>
@@ -20806,7 +20807,7 @@
           <a:p>
             <a:fld id="{694BD61C-20BA-43AF-A21F-1DAFB3200099}" type="datetime3">
               <a:rPr lang="en-US" smtClean="0"/>
-              <a:t>5 May 2026</a:t>
+              <a:t>1 June 2026</a:t>
             </a:fld>
             <a:endParaRPr lang="en-US"/>
           </a:p>
@@ -21295,7 +21296,7 @@
           <a:p>
             <a:fld id="{CABCB1B0-B6E5-4DD1-BB55-95C076D6C0C8}" type="datetime3">
               <a:rPr lang="en-US" smtClean="0"/>
-              <a:t>5 May 2026</a:t>
+              <a:t>1 June 2026</a:t>
             </a:fld>
             <a:endParaRPr lang="en-US"/>
           </a:p>
@@ -21841,7 +21842,7 @@
           <a:p>
             <a:fld id="{7A3E0868-4E26-4CDC-8A56-D70E2D8B12FE}" type="datetime3">
               <a:rPr lang="en-US" smtClean="0"/>
-              <a:t>5 May 2026</a:t>
+              <a:t>1 June 2026</a:t>
             </a:fld>
             <a:endParaRPr lang="en-US" dirty="0"/>
           </a:p>
@@ -22237,10 +22238,10 @@
       </p:grpSpPr>
       <p:sp>
         <p:nvSpPr>
-          <p:cNvPr id="4" name="Title 3">
-            <a:extLst>
-              <a:ext uri="{FF2B5EF4-FFF2-40B4-BE49-F238E27FC236}">
-                <a16:creationId xmlns:a16="http://schemas.microsoft.com/office/drawing/2014/main" id="{66D940C8-04DC-F0F4-7ADA-2AFE9ADEC654}"/>
+          <p:cNvPr id="2" name="Title 1">
+            <a:extLst>
+              <a:ext uri="{FF2B5EF4-FFF2-40B4-BE49-F238E27FC236}">
+                <a16:creationId xmlns:a16="http://schemas.microsoft.com/office/drawing/2014/main" id="{D6283BEB-6B8A-4F55-D4E5-5B6F95718146}"/>
               </a:ext>
             </a:extLst>
           </p:cNvPr>
@@ -22258,25 +22259,25 @@
           <a:p>
             <a:r>
               <a:rPr lang="en-US" dirty="0"/>
-              <a:t>Virtual Environments</a:t>
-            </a:r>
-          </a:p>
-        </p:txBody>
-      </p:sp>
-      <p:sp>
-        <p:nvSpPr>
-          <p:cNvPr id="2" name="Text Placeholder 1">
-            <a:extLst>
-              <a:ext uri="{FF2B5EF4-FFF2-40B4-BE49-F238E27FC236}">
-                <a16:creationId xmlns:a16="http://schemas.microsoft.com/office/drawing/2014/main" id="{3531B800-A950-C2C4-FAA6-D664AE2D6911}"/>
-              </a:ext>
-            </a:extLst>
-          </p:cNvPr>
-          <p:cNvSpPr>
-            <a:spLocks noGrp="1"/>
-          </p:cNvSpPr>
-          <p:nvPr>
-            <p:ph type="body" sz="quarter" idx="11"/>
+              <a:t>A Side Note:  Environment Variables</a:t>
+            </a:r>
+          </a:p>
+        </p:txBody>
+      </p:sp>
+      <p:sp>
+        <p:nvSpPr>
+          <p:cNvPr id="3" name="Content Placeholder 2">
+            <a:extLst>
+              <a:ext uri="{FF2B5EF4-FFF2-40B4-BE49-F238E27FC236}">
+                <a16:creationId xmlns:a16="http://schemas.microsoft.com/office/drawing/2014/main" id="{5E10BD81-2017-5477-FCFE-493F8DE98352}"/>
+              </a:ext>
+            </a:extLst>
+          </p:cNvPr>
+          <p:cNvSpPr>
+            <a:spLocks noGrp="1"/>
+          </p:cNvSpPr>
+          <p:nvPr>
+            <p:ph idx="1"/>
           </p:nvPr>
         </p:nvSpPr>
         <p:spPr/>
@@ -22284,14 +22285,35 @@
           <a:bodyPr/>
           <a:lstStyle/>
           <a:p>
-            <a:endParaRPr lang="en-US"/>
+            <a:r>
+              <a:rPr lang="en-US" dirty="0"/>
+              <a:t>Variables maintained at the OS level</a:t>
+            </a:r>
+          </a:p>
+          <a:p>
+            <a:r>
+              <a:rPr lang="en-US" dirty="0"/>
+              <a:t>Typically accessed as strings (but obvi can store numbers or other values as strings)</a:t>
+            </a:r>
+          </a:p>
+          <a:p>
+            <a:r>
+              <a:rPr lang="en-US" dirty="0"/>
+              <a:t>Can be modified and adjusted on the fly</a:t>
+            </a:r>
+          </a:p>
+          <a:p>
+            <a:r>
+              <a:rPr lang="en-US" dirty="0"/>
+              <a:t>PATH is just one of many typical variables</a:t>
+            </a:r>
           </a:p>
         </p:txBody>
       </p:sp>
     </p:spTree>
     <p:extLst>
       <p:ext uri="{BB962C8B-B14F-4D97-AF65-F5344CB8AC3E}">
-        <p14:creationId xmlns:p14="http://schemas.microsoft.com/office/powerpoint/2010/main" val="1738960769"/>
+        <p14:creationId xmlns:p14="http://schemas.microsoft.com/office/powerpoint/2010/main" val="1732645852"/>
       </p:ext>
     </p:extLst>
   </p:cSld>
@@ -22323,6 +22345,89 @@
           <p:cNvPr id="4" name="Title 3">
             <a:extLst>
               <a:ext uri="{FF2B5EF4-FFF2-40B4-BE49-F238E27FC236}">
+                <a16:creationId xmlns:a16="http://schemas.microsoft.com/office/drawing/2014/main" id="{66D940C8-04DC-F0F4-7ADA-2AFE9ADEC654}"/>
+              </a:ext>
+            </a:extLst>
+          </p:cNvPr>
+          <p:cNvSpPr>
+            <a:spLocks noGrp="1"/>
+          </p:cNvSpPr>
+          <p:nvPr>
+            <p:ph type="title"/>
+          </p:nvPr>
+        </p:nvSpPr>
+        <p:spPr/>
+        <p:txBody>
+          <a:bodyPr/>
+          <a:lstStyle/>
+          <a:p>
+            <a:r>
+              <a:rPr lang="en-US" dirty="0"/>
+              <a:t>Virtual Environments</a:t>
+            </a:r>
+          </a:p>
+        </p:txBody>
+      </p:sp>
+      <p:sp>
+        <p:nvSpPr>
+          <p:cNvPr id="2" name="Text Placeholder 1">
+            <a:extLst>
+              <a:ext uri="{FF2B5EF4-FFF2-40B4-BE49-F238E27FC236}">
+                <a16:creationId xmlns:a16="http://schemas.microsoft.com/office/drawing/2014/main" id="{3531B800-A950-C2C4-FAA6-D664AE2D6911}"/>
+              </a:ext>
+            </a:extLst>
+          </p:cNvPr>
+          <p:cNvSpPr>
+            <a:spLocks noGrp="1"/>
+          </p:cNvSpPr>
+          <p:nvPr>
+            <p:ph type="body" sz="quarter" idx="11"/>
+          </p:nvPr>
+        </p:nvSpPr>
+        <p:spPr/>
+        <p:txBody>
+          <a:bodyPr/>
+          <a:lstStyle/>
+          <a:p>
+            <a:endParaRPr lang="en-US"/>
+          </a:p>
+        </p:txBody>
+      </p:sp>
+    </p:spTree>
+    <p:extLst>
+      <p:ext uri="{BB962C8B-B14F-4D97-AF65-F5344CB8AC3E}">
+        <p14:creationId xmlns:p14="http://schemas.microsoft.com/office/powerpoint/2010/main" val="1738960769"/>
+      </p:ext>
+    </p:extLst>
+  </p:cSld>
+  <p:clrMapOvr>
+    <a:masterClrMapping/>
+  </p:clrMapOvr>
+</p:sld>
+</file>
+
+<file path=ppt/slides/slide12.xml><?xml version="1.0" encoding="utf-8"?>
+<p:sld xmlns:a="http://schemas.openxmlformats.org/drawingml/2006/main" xmlns:r="http://schemas.openxmlformats.org/officeDocument/2006/relationships" xmlns:p="http://schemas.openxmlformats.org/presentationml/2006/main">
+  <p:cSld>
+    <p:spTree>
+      <p:nvGrpSpPr>
+        <p:cNvPr id="1" name=""/>
+        <p:cNvGrpSpPr/>
+        <p:nvPr/>
+      </p:nvGrpSpPr>
+      <p:grpSpPr>
+        <a:xfrm>
+          <a:off x="0" y="0"/>
+          <a:ext cx="0" cy="0"/>
+          <a:chOff x="0" y="0"/>
+          <a:chExt cx="0" cy="0"/>
+        </a:xfrm>
+      </p:grpSpPr>
+      <p:sp>
+        <p:nvSpPr>
+          <p:cNvPr id="4" name="Title 3">
+            <a:extLst>
+              <a:ext uri="{FF2B5EF4-FFF2-40B4-BE49-F238E27FC236}">
                 <a16:creationId xmlns:a16="http://schemas.microsoft.com/office/drawing/2014/main" id="{6592B841-00FE-6472-A864-20EA95ABB18E}"/>
               </a:ext>
             </a:extLst>
@@ -22477,7 +22582,7 @@
 </p:sld>
 </file>
 
-<file path=ppt/slides/slide12.xml><?xml version="1.0" encoding="utf-8"?>
+<file path=ppt/slides/slide13.xml><?xml version="1.0" encoding="utf-8"?>
 <p:sld xmlns:a="http://schemas.openxmlformats.org/drawingml/2006/main" xmlns:r="http://schemas.openxmlformats.org/officeDocument/2006/relationships" xmlns:p="http://schemas.openxmlformats.org/presentationml/2006/main">
   <p:cSld>
     <p:spTree>
@@ -22849,7 +22954,7 @@
 </p:sld>
 </file>
 
-<file path=ppt/slides/slide13.xml><?xml version="1.0" encoding="utf-8"?>
+<file path=ppt/slides/slide14.xml><?xml version="1.0" encoding="utf-8"?>
 <p:sld xmlns:a="http://schemas.openxmlformats.org/drawingml/2006/main" xmlns:r="http://schemas.openxmlformats.org/officeDocument/2006/relationships" xmlns:p="http://schemas.openxmlformats.org/presentationml/2006/main">
   <p:cSld>
     <p:spTree>
@@ -23240,7 +23345,7 @@
 </p:sld>
 </file>
 
-<file path=ppt/slides/slide14.xml><?xml version="1.0" encoding="utf-8"?>
+<file path=ppt/slides/slide15.xml><?xml version="1.0" encoding="utf-8"?>
 <p:sld xmlns:a="http://schemas.openxmlformats.org/drawingml/2006/main" xmlns:r="http://schemas.openxmlformats.org/officeDocument/2006/relationships" xmlns:p="http://schemas.openxmlformats.org/presentationml/2006/main">
   <p:cSld>
     <p:spTree>
@@ -23393,6 +23498,111 @@
 </file>
 
 <file path=ppt/slides/slide2.xml><?xml version="1.0" encoding="utf-8"?>
+<p:sld xmlns:a="http://schemas.openxmlformats.org/drawingml/2006/main" xmlns:r="http://schemas.openxmlformats.org/officeDocument/2006/relationships" xmlns:p="http://schemas.openxmlformats.org/presentationml/2006/main">
+  <p:cSld>
+    <p:spTree>
+      <p:nvGrpSpPr>
+        <p:cNvPr id="1" name=""/>
+        <p:cNvGrpSpPr/>
+        <p:nvPr/>
+      </p:nvGrpSpPr>
+      <p:grpSpPr>
+        <a:xfrm>
+          <a:off x="0" y="0"/>
+          <a:ext cx="0" cy="0"/>
+          <a:chOff x="0" y="0"/>
+          <a:chExt cx="0" cy="0"/>
+        </a:xfrm>
+      </p:grpSpPr>
+      <p:sp>
+        <p:nvSpPr>
+          <p:cNvPr id="2" name="Title 1">
+            <a:extLst>
+              <a:ext uri="{FF2B5EF4-FFF2-40B4-BE49-F238E27FC236}">
+                <a16:creationId xmlns:a16="http://schemas.microsoft.com/office/drawing/2014/main" id="{0E70C934-2ECF-7489-9A80-BD15C8A42962}"/>
+              </a:ext>
+            </a:extLst>
+          </p:cNvPr>
+          <p:cNvSpPr>
+            <a:spLocks noGrp="1"/>
+          </p:cNvSpPr>
+          <p:nvPr>
+            <p:ph type="title"/>
+          </p:nvPr>
+        </p:nvSpPr>
+        <p:spPr/>
+        <p:txBody>
+          <a:bodyPr/>
+          <a:lstStyle/>
+          <a:p>
+            <a:r>
+              <a:rPr lang="en-US" dirty="0"/>
+              <a:t>Lesson Objectives</a:t>
+            </a:r>
+          </a:p>
+        </p:txBody>
+      </p:sp>
+      <p:sp>
+        <p:nvSpPr>
+          <p:cNvPr id="5" name="Content Placeholder 4">
+            <a:extLst>
+              <a:ext uri="{FF2B5EF4-FFF2-40B4-BE49-F238E27FC236}">
+                <a16:creationId xmlns:a16="http://schemas.microsoft.com/office/drawing/2014/main" id="{87FFE86A-2234-8E3B-88B4-3A4EEF395AC5}"/>
+              </a:ext>
+            </a:extLst>
+          </p:cNvPr>
+          <p:cNvSpPr>
+            <a:spLocks noGrp="1"/>
+          </p:cNvSpPr>
+          <p:nvPr>
+            <p:ph idx="1"/>
+          </p:nvPr>
+        </p:nvSpPr>
+        <p:spPr/>
+        <p:txBody>
+          <a:bodyPr/>
+          <a:lstStyle/>
+          <a:p>
+            <a:r>
+              <a:rPr lang="en-US" dirty="0"/>
+              <a:t>Understand how executables and pathing influence operating </a:t>
+            </a:r>
+            <a:r>
+              <a:rPr lang="en-US"/>
+              <a:t>system behavior</a:t>
+            </a:r>
+          </a:p>
+          <a:p>
+            <a:r>
+              <a:rPr lang="en-US" dirty="0"/>
+              <a:t>Identify which file (process) is being called when a command is executed</a:t>
+            </a:r>
+          </a:p>
+          <a:p>
+            <a:r>
+              <a:rPr lang="en-US" dirty="0"/>
+              <a:t>Modify a PATH environment variable</a:t>
+            </a:r>
+          </a:p>
+          <a:p>
+            <a:endParaRPr lang="en-US" dirty="0"/>
+          </a:p>
+        </p:txBody>
+      </p:sp>
+    </p:spTree>
+    <p:extLst>
+      <p:ext uri="{BB962C8B-B14F-4D97-AF65-F5344CB8AC3E}">
+        <p14:creationId xmlns:p14="http://schemas.microsoft.com/office/powerpoint/2010/main" val="3646994342"/>
+      </p:ext>
+    </p:extLst>
+  </p:cSld>
+  <p:clrMapOvr>
+    <a:masterClrMapping/>
+  </p:clrMapOvr>
+</p:sld>
+</file>
+
+<file path=ppt/slides/slide3.xml><?xml version="1.0" encoding="utf-8"?>
 <p:sld xmlns:a="http://schemas.openxmlformats.org/drawingml/2006/main" xmlns:r="http://schemas.openxmlformats.org/officeDocument/2006/relationships" xmlns:p="http://schemas.openxmlformats.org/presentationml/2006/main">
   <p:cSld>
     <p:spTree>
@@ -23812,7 +24022,7 @@
 </p:sld>
 </file>
 
-<file path=ppt/slides/slide3.xml><?xml version="1.0" encoding="utf-8"?>
+<file path=ppt/slides/slide4.xml><?xml version="1.0" encoding="utf-8"?>
 <p:sld xmlns:a="http://schemas.openxmlformats.org/drawingml/2006/main" xmlns:r="http://schemas.openxmlformats.org/officeDocument/2006/relationships" xmlns:p="http://schemas.openxmlformats.org/presentationml/2006/main">
   <p:cSld>
     <p:spTree>
@@ -24148,7 +24358,7 @@
 </p:sld>
 </file>
 
-<file path=ppt/slides/slide4.xml><?xml version="1.0" encoding="utf-8"?>
+<file path=ppt/slides/slide5.xml><?xml version="1.0" encoding="utf-8"?>
 <p:sld xmlns:a="http://schemas.openxmlformats.org/drawingml/2006/main" xmlns:r="http://schemas.openxmlformats.org/officeDocument/2006/relationships" xmlns:p="http://schemas.openxmlformats.org/presentationml/2006/main">
   <p:cSld>
     <p:spTree>
@@ -24303,7 +24513,7 @@
 </p:sld>
 </file>
 
-<file path=ppt/slides/slide5.xml><?xml version="1.0" encoding="utf-8"?>
+<file path=ppt/slides/slide6.xml><?xml version="1.0" encoding="utf-8"?>
 <p:sld xmlns:a="http://schemas.openxmlformats.org/drawingml/2006/main" xmlns:r="http://schemas.openxmlformats.org/officeDocument/2006/relationships" xmlns:p="http://schemas.openxmlformats.org/presentationml/2006/main">
   <p:cSld>
     <p:spTree>
@@ -24484,104 +24694,6 @@
 </p:sld>
 </file>
 
-<file path=ppt/slides/slide6.xml><?xml version="1.0" encoding="utf-8"?>
-<p:sld xmlns:a="http://schemas.openxmlformats.org/drawingml/2006/main" xmlns:r="http://schemas.openxmlformats.org/officeDocument/2006/relationships" xmlns:p="http://schemas.openxmlformats.org/presentationml/2006/main">
-  <p:cSld>
-    <p:spTree>
-      <p:nvGrpSpPr>
-        <p:cNvPr id="1" name=""/>
-        <p:cNvGrpSpPr/>
-        <p:nvPr/>
-      </p:nvGrpSpPr>
-      <p:grpSpPr>
-        <a:xfrm>
-          <a:off x="0" y="0"/>
-          <a:ext cx="0" cy="0"/>
-          <a:chOff x="0" y="0"/>
-          <a:chExt cx="0" cy="0"/>
-        </a:xfrm>
-      </p:grpSpPr>
-      <p:sp>
-        <p:nvSpPr>
-          <p:cNvPr id="7" name="Title 6">
-            <a:extLst>
-              <a:ext uri="{FF2B5EF4-FFF2-40B4-BE49-F238E27FC236}">
-                <a16:creationId xmlns:a16="http://schemas.microsoft.com/office/drawing/2014/main" id="{D56224DD-6DF5-F5D1-5AFF-9A17767A8ED0}"/>
-              </a:ext>
-            </a:extLst>
-          </p:cNvPr>
-          <p:cNvSpPr>
-            <a:spLocks noGrp="1"/>
-          </p:cNvSpPr>
-          <p:nvPr>
-            <p:ph type="title"/>
-          </p:nvPr>
-        </p:nvSpPr>
-        <p:spPr/>
-        <p:txBody>
-          <a:bodyPr/>
-          <a:lstStyle/>
-          <a:p>
-            <a:r>
-              <a:rPr lang="en-US" dirty="0"/>
-              <a:t>What is the PATH?</a:t>
-            </a:r>
-          </a:p>
-        </p:txBody>
-      </p:sp>
-      <p:sp>
-        <p:nvSpPr>
-          <p:cNvPr id="8" name="Content Placeholder 7">
-            <a:extLst>
-              <a:ext uri="{FF2B5EF4-FFF2-40B4-BE49-F238E27FC236}">
-                <a16:creationId xmlns:a16="http://schemas.microsoft.com/office/drawing/2014/main" id="{A17E43E9-111D-C4CA-BF7B-6F371E16F110}"/>
-              </a:ext>
-            </a:extLst>
-          </p:cNvPr>
-          <p:cNvSpPr>
-            <a:spLocks noGrp="1"/>
-          </p:cNvSpPr>
-          <p:nvPr>
-            <p:ph idx="1"/>
-          </p:nvPr>
-        </p:nvSpPr>
-        <p:spPr/>
-        <p:txBody>
-          <a:bodyPr/>
-          <a:lstStyle/>
-          <a:p>
-            <a:r>
-              <a:rPr lang="en-US" dirty="0"/>
-              <a:t>A list of directories to find executables within</a:t>
-            </a:r>
-          </a:p>
-          <a:p>
-            <a:r>
-              <a:rPr lang="en-US" dirty="0"/>
-              <a:t>The OS will search directories in order</a:t>
-            </a:r>
-          </a:p>
-          <a:p>
-            <a:r>
-              <a:rPr lang="en-US" dirty="0"/>
-              <a:t>The first match is the executable that is executed</a:t>
-            </a:r>
-          </a:p>
-        </p:txBody>
-      </p:sp>
-    </p:spTree>
-    <p:extLst>
-      <p:ext uri="{BB962C8B-B14F-4D97-AF65-F5344CB8AC3E}">
-        <p14:creationId xmlns:p14="http://schemas.microsoft.com/office/powerpoint/2010/main" val="3452796235"/>
-      </p:ext>
-    </p:extLst>
-  </p:cSld>
-  <p:clrMapOvr>
-    <a:masterClrMapping/>
-  </p:clrMapOvr>
-</p:sld>
-</file>
-
 <file path=ppt/slides/slide7.xml><?xml version="1.0" encoding="utf-8"?>
 <p:sld xmlns:a="http://schemas.openxmlformats.org/drawingml/2006/main" xmlns:r="http://schemas.openxmlformats.org/officeDocument/2006/relationships" xmlns:p="http://schemas.openxmlformats.org/presentationml/2006/main">
   <p:cSld>
@@ -24601,10 +24713,10 @@
       </p:grpSpPr>
       <p:sp>
         <p:nvSpPr>
-          <p:cNvPr id="2" name="Title 1">
-            <a:extLst>
-              <a:ext uri="{FF2B5EF4-FFF2-40B4-BE49-F238E27FC236}">
-                <a16:creationId xmlns:a16="http://schemas.microsoft.com/office/drawing/2014/main" id="{007D57B2-713C-7765-DCEC-79F3EA9020A9}"/>
+          <p:cNvPr id="7" name="Title 6">
+            <a:extLst>
+              <a:ext uri="{FF2B5EF4-FFF2-40B4-BE49-F238E27FC236}">
+                <a16:creationId xmlns:a16="http://schemas.microsoft.com/office/drawing/2014/main" id="{D56224DD-6DF5-F5D1-5AFF-9A17767A8ED0}"/>
               </a:ext>
             </a:extLst>
           </p:cNvPr>
@@ -24622,25 +24734,25 @@
           <a:p>
             <a:r>
               <a:rPr lang="en-US" dirty="0"/>
-              <a:t>Look to the PATH</a:t>
-            </a:r>
-          </a:p>
-        </p:txBody>
-      </p:sp>
-      <p:sp>
-        <p:nvSpPr>
-          <p:cNvPr id="4" name="Text Placeholder 3">
-            <a:extLst>
-              <a:ext uri="{FF2B5EF4-FFF2-40B4-BE49-F238E27FC236}">
-                <a16:creationId xmlns:a16="http://schemas.microsoft.com/office/drawing/2014/main" id="{41BFF26D-E8E4-A533-8193-27E34AE1A52B}"/>
-              </a:ext>
-            </a:extLst>
-          </p:cNvPr>
-          <p:cNvSpPr>
-            <a:spLocks noGrp="1"/>
-          </p:cNvSpPr>
-          <p:nvPr>
-            <p:ph type="body" idx="1"/>
+              <a:t>What is the PATH?</a:t>
+            </a:r>
+          </a:p>
+        </p:txBody>
+      </p:sp>
+      <p:sp>
+        <p:nvSpPr>
+          <p:cNvPr id="8" name="Content Placeholder 7">
+            <a:extLst>
+              <a:ext uri="{FF2B5EF4-FFF2-40B4-BE49-F238E27FC236}">
+                <a16:creationId xmlns:a16="http://schemas.microsoft.com/office/drawing/2014/main" id="{A17E43E9-111D-C4CA-BF7B-6F371E16F110}"/>
+              </a:ext>
+            </a:extLst>
+          </p:cNvPr>
+          <p:cNvSpPr>
+            <a:spLocks noGrp="1"/>
+          </p:cNvSpPr>
+          <p:nvPr>
+            <p:ph idx="1"/>
           </p:nvPr>
         </p:nvSpPr>
         <p:spPr/>
@@ -24650,252 +24762,27 @@
           <a:p>
             <a:r>
               <a:rPr lang="en-US" dirty="0"/>
-              <a:t>Windows</a:t>
-            </a:r>
-          </a:p>
-        </p:txBody>
-      </p:sp>
-      <p:sp>
-        <p:nvSpPr>
-          <p:cNvPr id="5" name="Content Placeholder 4">
-            <a:extLst>
-              <a:ext uri="{FF2B5EF4-FFF2-40B4-BE49-F238E27FC236}">
-                <a16:creationId xmlns:a16="http://schemas.microsoft.com/office/drawing/2014/main" id="{874050EF-79C9-6E15-702E-4920E9702599}"/>
-              </a:ext>
-            </a:extLst>
-          </p:cNvPr>
-          <p:cNvSpPr>
-            <a:spLocks noGrp="1"/>
-          </p:cNvSpPr>
-          <p:nvPr>
-            <p:ph sz="half" idx="2"/>
-          </p:nvPr>
-        </p:nvSpPr>
-        <p:spPr/>
-        <p:txBody>
-          <a:bodyPr>
-            <a:normAutofit/>
-          </a:bodyPr>
-          <a:lstStyle/>
+              <a:t>A list of directories to find executables within</a:t>
+            </a:r>
+          </a:p>
           <a:p>
             <a:r>
               <a:rPr lang="en-US" dirty="0"/>
-              <a:t>System Properties </a:t>
-            </a:r>
-            <a:r>
-              <a:rPr lang="en-US" dirty="0">
-                <a:sym typeface="Wingdings" panose="05000000000000000000" pitchFamily="2" charset="2"/>
-              </a:rPr>
-              <a:t> Environment Variables  Path</a:t>
-            </a:r>
-          </a:p>
-          <a:p>
-            <a:r>
-              <a:rPr lang="en-US" dirty="0" err="1">
-                <a:sym typeface="Wingdings" panose="05000000000000000000" pitchFamily="2" charset="2"/>
-              </a:rPr>
-              <a:t>Powershell</a:t>
-            </a:r>
-            <a:r>
-              <a:rPr lang="en-US" dirty="0">
-                <a:sym typeface="Wingdings" panose="05000000000000000000" pitchFamily="2" charset="2"/>
-              </a:rPr>
-              <a:t>: </a:t>
-            </a:r>
-            <a:r>
-              <a:rPr lang="en-US" dirty="0">
-                <a:latin typeface="Courier New" panose="02070309020205020404" pitchFamily="49" charset="0"/>
-                <a:cs typeface="Courier New" panose="02070309020205020404" pitchFamily="49" charset="0"/>
-                <a:sym typeface="Wingdings" panose="05000000000000000000" pitchFamily="2" charset="2"/>
-              </a:rPr>
-              <a:t>$</a:t>
-            </a:r>
-            <a:r>
-              <a:rPr lang="en-US" dirty="0" err="1">
-                <a:latin typeface="Courier New" panose="02070309020205020404" pitchFamily="49" charset="0"/>
-                <a:cs typeface="Courier New" panose="02070309020205020404" pitchFamily="49" charset="0"/>
-                <a:sym typeface="Wingdings" panose="05000000000000000000" pitchFamily="2" charset="2"/>
-              </a:rPr>
-              <a:t>env:path</a:t>
-            </a:r>
-            <a:endParaRPr lang="en-US" dirty="0">
-              <a:latin typeface="Courier New" panose="02070309020205020404" pitchFamily="49" charset="0"/>
-              <a:cs typeface="Courier New" panose="02070309020205020404" pitchFamily="49" charset="0"/>
-              <a:sym typeface="Wingdings" panose="05000000000000000000" pitchFamily="2" charset="2"/>
-            </a:endParaRPr>
-          </a:p>
-          <a:p>
-            <a:r>
-              <a:rPr lang="en-US" dirty="0" err="1">
-                <a:sym typeface="Wingdings" panose="05000000000000000000" pitchFamily="2" charset="2"/>
-              </a:rPr>
-              <a:t>Cmd</a:t>
-            </a:r>
-            <a:r>
-              <a:rPr lang="en-US" dirty="0">
-                <a:sym typeface="Wingdings" panose="05000000000000000000" pitchFamily="2" charset="2"/>
-              </a:rPr>
-              <a:t>: </a:t>
-            </a:r>
-            <a:r>
-              <a:rPr lang="en-US" dirty="0">
-                <a:latin typeface="Courier New" panose="02070309020205020404" pitchFamily="49" charset="0"/>
-                <a:cs typeface="Courier New" panose="02070309020205020404" pitchFamily="49" charset="0"/>
-                <a:sym typeface="Wingdings" panose="05000000000000000000" pitchFamily="2" charset="2"/>
-              </a:rPr>
-              <a:t>set path</a:t>
-            </a:r>
-          </a:p>
-          <a:p>
-            <a:pPr marL="0" indent="0">
-              <a:buNone/>
-            </a:pPr>
-            <a:endParaRPr lang="en-US" dirty="0">
-              <a:sym typeface="Wingdings" panose="05000000000000000000" pitchFamily="2" charset="2"/>
-            </a:endParaRPr>
-          </a:p>
-          <a:p>
-            <a:r>
-              <a:rPr lang="en-US" dirty="0">
-                <a:sym typeface="Wingdings" panose="05000000000000000000" pitchFamily="2" charset="2"/>
-              </a:rPr>
-              <a:t>What does it look like?</a:t>
-            </a:r>
-          </a:p>
-          <a:p>
-            <a:r>
-              <a:rPr lang="en-US" dirty="0">
-                <a:sym typeface="Wingdings" panose="05000000000000000000" pitchFamily="2" charset="2"/>
-              </a:rPr>
-              <a:t>System and user level</a:t>
-            </a:r>
-          </a:p>
-          <a:p>
-            <a:endParaRPr lang="en-US" dirty="0"/>
-          </a:p>
-        </p:txBody>
-      </p:sp>
-      <p:sp>
-        <p:nvSpPr>
-          <p:cNvPr id="6" name="Text Placeholder 5">
-            <a:extLst>
-              <a:ext uri="{FF2B5EF4-FFF2-40B4-BE49-F238E27FC236}">
-                <a16:creationId xmlns:a16="http://schemas.microsoft.com/office/drawing/2014/main" id="{A80B3CA4-4F95-AADF-4534-1975F07C2478}"/>
-              </a:ext>
-            </a:extLst>
-          </p:cNvPr>
-          <p:cNvSpPr>
-            <a:spLocks noGrp="1"/>
-          </p:cNvSpPr>
-          <p:nvPr>
-            <p:ph type="body" sz="quarter" idx="3"/>
-          </p:nvPr>
-        </p:nvSpPr>
-        <p:spPr/>
-        <p:txBody>
-          <a:bodyPr/>
-          <a:lstStyle/>
+              <a:t>The OS will search directories in order</a:t>
+            </a:r>
+          </a:p>
           <a:p>
             <a:r>
               <a:rPr lang="en-US" dirty="0"/>
-              <a:t>Linux</a:t>
-            </a:r>
-          </a:p>
-        </p:txBody>
-      </p:sp>
-      <p:sp>
-        <p:nvSpPr>
-          <p:cNvPr id="7" name="Content Placeholder 6">
-            <a:extLst>
-              <a:ext uri="{FF2B5EF4-FFF2-40B4-BE49-F238E27FC236}">
-                <a16:creationId xmlns:a16="http://schemas.microsoft.com/office/drawing/2014/main" id="{0738A67A-37C6-2FFC-5E4B-1FA460D02EF4}"/>
-              </a:ext>
-            </a:extLst>
-          </p:cNvPr>
-          <p:cNvSpPr>
-            <a:spLocks noGrp="1"/>
-          </p:cNvSpPr>
-          <p:nvPr>
-            <p:ph sz="quarter" idx="4"/>
-          </p:nvPr>
-        </p:nvSpPr>
-        <p:spPr/>
-        <p:txBody>
-          <a:bodyPr>
-            <a:normAutofit/>
-          </a:bodyPr>
-          <a:lstStyle/>
-          <a:p>
-            <a:r>
-              <a:rPr lang="en-US" dirty="0">
-                <a:latin typeface="Courier New" panose="02070309020205020404" pitchFamily="49" charset="0"/>
-                <a:cs typeface="Courier New" panose="02070309020205020404" pitchFamily="49" charset="0"/>
-              </a:rPr>
-              <a:t>echo $PATH</a:t>
-            </a:r>
-          </a:p>
-          <a:p>
-            <a:r>
-              <a:rPr lang="en-US" dirty="0">
-                <a:cs typeface="Courier New" panose="02070309020205020404" pitchFamily="49" charset="0"/>
-              </a:rPr>
-              <a:t>Or…</a:t>
-            </a:r>
-          </a:p>
-          <a:p>
-            <a:r>
-              <a:rPr lang="pt-BR" dirty="0">
-                <a:latin typeface="Courier New" panose="02070309020205020404" pitchFamily="49" charset="0"/>
-                <a:cs typeface="Courier New" panose="02070309020205020404" pitchFamily="49" charset="0"/>
-              </a:rPr>
-              <a:t>echo $PATH | sed 's/:/\n/g'</a:t>
-            </a:r>
-            <a:endParaRPr lang="en-US" dirty="0">
-              <a:latin typeface="Courier New" panose="02070309020205020404" pitchFamily="49" charset="0"/>
-              <a:cs typeface="Courier New" panose="02070309020205020404" pitchFamily="49" charset="0"/>
-            </a:endParaRPr>
-          </a:p>
-          <a:p>
-            <a:endParaRPr lang="en-US" dirty="0">
-              <a:cs typeface="Courier New" panose="02070309020205020404" pitchFamily="49" charset="0"/>
-            </a:endParaRPr>
-          </a:p>
-        </p:txBody>
-      </p:sp>
-      <p:pic>
-        <p:nvPicPr>
-          <p:cNvPr id="3" name="Picture 2">
-            <a:extLst>
-              <a:ext uri="{FF2B5EF4-FFF2-40B4-BE49-F238E27FC236}">
-                <a16:creationId xmlns:a16="http://schemas.microsoft.com/office/drawing/2014/main" id="{65622773-025B-530C-2FB4-3F50B163F8BE}"/>
-              </a:ext>
-            </a:extLst>
-          </p:cNvPr>
-          <p:cNvPicPr>
-            <a:picLocks noChangeAspect="1"/>
-          </p:cNvPicPr>
-          <p:nvPr/>
-        </p:nvPicPr>
-        <p:blipFill>
-          <a:blip r:embed="rId3"/>
-          <a:stretch>
-            <a:fillRect/>
-          </a:stretch>
-        </p:blipFill>
-        <p:spPr>
-          <a:xfrm>
-            <a:off x="3875385" y="3821113"/>
-            <a:ext cx="8222271" cy="2222859"/>
-          </a:xfrm>
-          <a:prstGeom prst="rect">
-            <a:avLst/>
-          </a:prstGeom>
-        </p:spPr>
-      </p:pic>
+              <a:t>The first match is the executable that is executed</a:t>
+            </a:r>
+          </a:p>
+        </p:txBody>
+      </p:sp>
     </p:spTree>
     <p:extLst>
       <p:ext uri="{BB962C8B-B14F-4D97-AF65-F5344CB8AC3E}">
-        <p14:creationId xmlns:p14="http://schemas.microsoft.com/office/powerpoint/2010/main" val="527736500"/>
+        <p14:creationId xmlns:p14="http://schemas.microsoft.com/office/powerpoint/2010/main" val="3452796235"/>
       </p:ext>
     </p:extLst>
   </p:cSld>
@@ -24927,7 +24814,7 @@
           <p:cNvPr id="2" name="Title 1">
             <a:extLst>
               <a:ext uri="{FF2B5EF4-FFF2-40B4-BE49-F238E27FC236}">
-                <a16:creationId xmlns:a16="http://schemas.microsoft.com/office/drawing/2014/main" id="{452658D5-CA01-98E4-E796-DFCF731E8ABE}"/>
+                <a16:creationId xmlns:a16="http://schemas.microsoft.com/office/drawing/2014/main" id="{007D57B2-713C-7765-DCEC-79F3EA9020A9}"/>
               </a:ext>
             </a:extLst>
           </p:cNvPr>
@@ -24945,25 +24832,25 @@
           <a:p>
             <a:r>
               <a:rPr lang="en-US" dirty="0"/>
-              <a:t>What if something isn’t on the PATH?</a:t>
-            </a:r>
-          </a:p>
-        </p:txBody>
-      </p:sp>
-      <p:sp>
-        <p:nvSpPr>
-          <p:cNvPr id="3" name="Content Placeholder 2">
-            <a:extLst>
-              <a:ext uri="{FF2B5EF4-FFF2-40B4-BE49-F238E27FC236}">
-                <a16:creationId xmlns:a16="http://schemas.microsoft.com/office/drawing/2014/main" id="{457CD518-363A-E5B5-C00C-0B8AAB18AB58}"/>
-              </a:ext>
-            </a:extLst>
-          </p:cNvPr>
-          <p:cNvSpPr>
-            <a:spLocks noGrp="1"/>
-          </p:cNvSpPr>
-          <p:nvPr>
-            <p:ph idx="1"/>
+              <a:t>Look to the PATH</a:t>
+            </a:r>
+          </a:p>
+        </p:txBody>
+      </p:sp>
+      <p:sp>
+        <p:nvSpPr>
+          <p:cNvPr id="4" name="Text Placeholder 3">
+            <a:extLst>
+              <a:ext uri="{FF2B5EF4-FFF2-40B4-BE49-F238E27FC236}">
+                <a16:creationId xmlns:a16="http://schemas.microsoft.com/office/drawing/2014/main" id="{41BFF26D-E8E4-A533-8193-27E34AE1A52B}"/>
+              </a:ext>
+            </a:extLst>
+          </p:cNvPr>
+          <p:cNvSpPr>
+            <a:spLocks noGrp="1"/>
+          </p:cNvSpPr>
+          <p:nvPr>
+            <p:ph type="body" idx="1"/>
           </p:nvPr>
         </p:nvSpPr>
         <p:spPr/>
@@ -24973,15 +24860,252 @@
           <a:p>
             <a:r>
               <a:rPr lang="en-US" dirty="0"/>
-              <a:t>What do you think happens?</a:t>
-            </a:r>
-          </a:p>
-        </p:txBody>
-      </p:sp>
+              <a:t>Windows</a:t>
+            </a:r>
+          </a:p>
+        </p:txBody>
+      </p:sp>
+      <p:sp>
+        <p:nvSpPr>
+          <p:cNvPr id="5" name="Content Placeholder 4">
+            <a:extLst>
+              <a:ext uri="{FF2B5EF4-FFF2-40B4-BE49-F238E27FC236}">
+                <a16:creationId xmlns:a16="http://schemas.microsoft.com/office/drawing/2014/main" id="{874050EF-79C9-6E15-702E-4920E9702599}"/>
+              </a:ext>
+            </a:extLst>
+          </p:cNvPr>
+          <p:cNvSpPr>
+            <a:spLocks noGrp="1"/>
+          </p:cNvSpPr>
+          <p:nvPr>
+            <p:ph sz="half" idx="2"/>
+          </p:nvPr>
+        </p:nvSpPr>
+        <p:spPr/>
+        <p:txBody>
+          <a:bodyPr>
+            <a:normAutofit/>
+          </a:bodyPr>
+          <a:lstStyle/>
+          <a:p>
+            <a:r>
+              <a:rPr lang="en-US" dirty="0"/>
+              <a:t>System Properties </a:t>
+            </a:r>
+            <a:r>
+              <a:rPr lang="en-US" dirty="0">
+                <a:sym typeface="Wingdings" panose="05000000000000000000" pitchFamily="2" charset="2"/>
+              </a:rPr>
+              <a:t> Environment Variables  Path</a:t>
+            </a:r>
+          </a:p>
+          <a:p>
+            <a:r>
+              <a:rPr lang="en-US" dirty="0" err="1">
+                <a:sym typeface="Wingdings" panose="05000000000000000000" pitchFamily="2" charset="2"/>
+              </a:rPr>
+              <a:t>Powershell</a:t>
+            </a:r>
+            <a:r>
+              <a:rPr lang="en-US" dirty="0">
+                <a:sym typeface="Wingdings" panose="05000000000000000000" pitchFamily="2" charset="2"/>
+              </a:rPr>
+              <a:t>: </a:t>
+            </a:r>
+            <a:r>
+              <a:rPr lang="en-US" dirty="0">
+                <a:latin typeface="Courier New" panose="02070309020205020404" pitchFamily="49" charset="0"/>
+                <a:cs typeface="Courier New" panose="02070309020205020404" pitchFamily="49" charset="0"/>
+                <a:sym typeface="Wingdings" panose="05000000000000000000" pitchFamily="2" charset="2"/>
+              </a:rPr>
+              <a:t>$</a:t>
+            </a:r>
+            <a:r>
+              <a:rPr lang="en-US" dirty="0" err="1">
+                <a:latin typeface="Courier New" panose="02070309020205020404" pitchFamily="49" charset="0"/>
+                <a:cs typeface="Courier New" panose="02070309020205020404" pitchFamily="49" charset="0"/>
+                <a:sym typeface="Wingdings" panose="05000000000000000000" pitchFamily="2" charset="2"/>
+              </a:rPr>
+              <a:t>env:path</a:t>
+            </a:r>
+            <a:endParaRPr lang="en-US" dirty="0">
+              <a:latin typeface="Courier New" panose="02070309020205020404" pitchFamily="49" charset="0"/>
+              <a:cs typeface="Courier New" panose="02070309020205020404" pitchFamily="49" charset="0"/>
+              <a:sym typeface="Wingdings" panose="05000000000000000000" pitchFamily="2" charset="2"/>
+            </a:endParaRPr>
+          </a:p>
+          <a:p>
+            <a:r>
+              <a:rPr lang="en-US" dirty="0" err="1">
+                <a:sym typeface="Wingdings" panose="05000000000000000000" pitchFamily="2" charset="2"/>
+              </a:rPr>
+              <a:t>Cmd</a:t>
+            </a:r>
+            <a:r>
+              <a:rPr lang="en-US" dirty="0">
+                <a:sym typeface="Wingdings" panose="05000000000000000000" pitchFamily="2" charset="2"/>
+              </a:rPr>
+              <a:t>: </a:t>
+            </a:r>
+            <a:r>
+              <a:rPr lang="en-US" dirty="0">
+                <a:latin typeface="Courier New" panose="02070309020205020404" pitchFamily="49" charset="0"/>
+                <a:cs typeface="Courier New" panose="02070309020205020404" pitchFamily="49" charset="0"/>
+                <a:sym typeface="Wingdings" panose="05000000000000000000" pitchFamily="2" charset="2"/>
+              </a:rPr>
+              <a:t>set path</a:t>
+            </a:r>
+          </a:p>
+          <a:p>
+            <a:pPr marL="0" indent="0">
+              <a:buNone/>
+            </a:pPr>
+            <a:endParaRPr lang="en-US" dirty="0">
+              <a:sym typeface="Wingdings" panose="05000000000000000000" pitchFamily="2" charset="2"/>
+            </a:endParaRPr>
+          </a:p>
+          <a:p>
+            <a:r>
+              <a:rPr lang="en-US" dirty="0">
+                <a:sym typeface="Wingdings" panose="05000000000000000000" pitchFamily="2" charset="2"/>
+              </a:rPr>
+              <a:t>What does it look like?</a:t>
+            </a:r>
+          </a:p>
+          <a:p>
+            <a:r>
+              <a:rPr lang="en-US" dirty="0">
+                <a:sym typeface="Wingdings" panose="05000000000000000000" pitchFamily="2" charset="2"/>
+              </a:rPr>
+              <a:t>System and user level</a:t>
+            </a:r>
+          </a:p>
+          <a:p>
+            <a:endParaRPr lang="en-US" dirty="0"/>
+          </a:p>
+        </p:txBody>
+      </p:sp>
+      <p:sp>
+        <p:nvSpPr>
+          <p:cNvPr id="6" name="Text Placeholder 5">
+            <a:extLst>
+              <a:ext uri="{FF2B5EF4-FFF2-40B4-BE49-F238E27FC236}">
+                <a16:creationId xmlns:a16="http://schemas.microsoft.com/office/drawing/2014/main" id="{A80B3CA4-4F95-AADF-4534-1975F07C2478}"/>
+              </a:ext>
+            </a:extLst>
+          </p:cNvPr>
+          <p:cNvSpPr>
+            <a:spLocks noGrp="1"/>
+          </p:cNvSpPr>
+          <p:nvPr>
+            <p:ph type="body" sz="quarter" idx="3"/>
+          </p:nvPr>
+        </p:nvSpPr>
+        <p:spPr/>
+        <p:txBody>
+          <a:bodyPr/>
+          <a:lstStyle/>
+          <a:p>
+            <a:r>
+              <a:rPr lang="en-US" dirty="0"/>
+              <a:t>Linux</a:t>
+            </a:r>
+          </a:p>
+        </p:txBody>
+      </p:sp>
+      <p:sp>
+        <p:nvSpPr>
+          <p:cNvPr id="7" name="Content Placeholder 6">
+            <a:extLst>
+              <a:ext uri="{FF2B5EF4-FFF2-40B4-BE49-F238E27FC236}">
+                <a16:creationId xmlns:a16="http://schemas.microsoft.com/office/drawing/2014/main" id="{0738A67A-37C6-2FFC-5E4B-1FA460D02EF4}"/>
+              </a:ext>
+            </a:extLst>
+          </p:cNvPr>
+          <p:cNvSpPr>
+            <a:spLocks noGrp="1"/>
+          </p:cNvSpPr>
+          <p:nvPr>
+            <p:ph sz="quarter" idx="4"/>
+          </p:nvPr>
+        </p:nvSpPr>
+        <p:spPr/>
+        <p:txBody>
+          <a:bodyPr>
+            <a:normAutofit/>
+          </a:bodyPr>
+          <a:lstStyle/>
+          <a:p>
+            <a:r>
+              <a:rPr lang="en-US" dirty="0">
+                <a:latin typeface="Courier New" panose="02070309020205020404" pitchFamily="49" charset="0"/>
+                <a:cs typeface="Courier New" panose="02070309020205020404" pitchFamily="49" charset="0"/>
+              </a:rPr>
+              <a:t>echo $PATH</a:t>
+            </a:r>
+          </a:p>
+          <a:p>
+            <a:r>
+              <a:rPr lang="en-US" dirty="0">
+                <a:cs typeface="Courier New" panose="02070309020205020404" pitchFamily="49" charset="0"/>
+              </a:rPr>
+              <a:t>Or…</a:t>
+            </a:r>
+          </a:p>
+          <a:p>
+            <a:r>
+              <a:rPr lang="pt-BR" dirty="0">
+                <a:latin typeface="Courier New" panose="02070309020205020404" pitchFamily="49" charset="0"/>
+                <a:cs typeface="Courier New" panose="02070309020205020404" pitchFamily="49" charset="0"/>
+              </a:rPr>
+              <a:t>echo $PATH | sed 's/:/\n/g'</a:t>
+            </a:r>
+            <a:endParaRPr lang="en-US" dirty="0">
+              <a:latin typeface="Courier New" panose="02070309020205020404" pitchFamily="49" charset="0"/>
+              <a:cs typeface="Courier New" panose="02070309020205020404" pitchFamily="49" charset="0"/>
+            </a:endParaRPr>
+          </a:p>
+          <a:p>
+            <a:endParaRPr lang="en-US" dirty="0">
+              <a:cs typeface="Courier New" panose="02070309020205020404" pitchFamily="49" charset="0"/>
+            </a:endParaRPr>
+          </a:p>
+        </p:txBody>
+      </p:sp>
+      <p:pic>
+        <p:nvPicPr>
+          <p:cNvPr id="3" name="Picture 2">
+            <a:extLst>
+              <a:ext uri="{FF2B5EF4-FFF2-40B4-BE49-F238E27FC236}">
+                <a16:creationId xmlns:a16="http://schemas.microsoft.com/office/drawing/2014/main" id="{65622773-025B-530C-2FB4-3F50B163F8BE}"/>
+              </a:ext>
+            </a:extLst>
+          </p:cNvPr>
+          <p:cNvPicPr>
+            <a:picLocks noChangeAspect="1"/>
+          </p:cNvPicPr>
+          <p:nvPr/>
+        </p:nvPicPr>
+        <p:blipFill>
+          <a:blip r:embed="rId3"/>
+          <a:stretch>
+            <a:fillRect/>
+          </a:stretch>
+        </p:blipFill>
+        <p:spPr>
+          <a:xfrm>
+            <a:off x="3875385" y="3821113"/>
+            <a:ext cx="8222271" cy="2222859"/>
+          </a:xfrm>
+          <a:prstGeom prst="rect">
+            <a:avLst/>
+          </a:prstGeom>
+        </p:spPr>
+      </p:pic>
     </p:spTree>
     <p:extLst>
       <p:ext uri="{BB962C8B-B14F-4D97-AF65-F5344CB8AC3E}">
-        <p14:creationId xmlns:p14="http://schemas.microsoft.com/office/powerpoint/2010/main" val="3478009495"/>
+        <p14:creationId xmlns:p14="http://schemas.microsoft.com/office/powerpoint/2010/main" val="527736500"/>
       </p:ext>
     </p:extLst>
   </p:cSld>
@@ -25013,7 +25137,7 @@
           <p:cNvPr id="2" name="Title 1">
             <a:extLst>
               <a:ext uri="{FF2B5EF4-FFF2-40B4-BE49-F238E27FC236}">
-                <a16:creationId xmlns:a16="http://schemas.microsoft.com/office/drawing/2014/main" id="{D6283BEB-6B8A-4F55-D4E5-5B6F95718146}"/>
+                <a16:creationId xmlns:a16="http://schemas.microsoft.com/office/drawing/2014/main" id="{452658D5-CA01-98E4-E796-DFCF731E8ABE}"/>
               </a:ext>
             </a:extLst>
           </p:cNvPr>
@@ -25031,7 +25155,7 @@
           <a:p>
             <a:r>
               <a:rPr lang="en-US" dirty="0"/>
-              <a:t>A Side Note:  Environment Variables</a:t>
+              <a:t>What if something isn’t on the PATH?</a:t>
             </a:r>
           </a:p>
         </p:txBody>
@@ -25041,7 +25165,7 @@
           <p:cNvPr id="3" name="Content Placeholder 2">
             <a:extLst>
               <a:ext uri="{FF2B5EF4-FFF2-40B4-BE49-F238E27FC236}">
-                <a16:creationId xmlns:a16="http://schemas.microsoft.com/office/drawing/2014/main" id="{5E10BD81-2017-5477-FCFE-493F8DE98352}"/>
+                <a16:creationId xmlns:a16="http://schemas.microsoft.com/office/drawing/2014/main" id="{457CD518-363A-E5B5-C00C-0B8AAB18AB58}"/>
               </a:ext>
             </a:extLst>
           </p:cNvPr>
@@ -25059,25 +25183,7 @@
           <a:p>
             <a:r>
               <a:rPr lang="en-US" dirty="0"/>
-              <a:t>Variables maintained at the OS level</a:t>
-            </a:r>
-          </a:p>
-          <a:p>
-            <a:r>
-              <a:rPr lang="en-US" dirty="0"/>
-              <a:t>Typically accessed as strings (but obvi can store numbers or other values as strings)</a:t>
-            </a:r>
-          </a:p>
-          <a:p>
-            <a:r>
-              <a:rPr lang="en-US" dirty="0"/>
-              <a:t>Can be modified and adjusted on the fly</a:t>
-            </a:r>
-          </a:p>
-          <a:p>
-            <a:r>
-              <a:rPr lang="en-US" dirty="0"/>
-              <a:t>PATH is just one of many typical variables</a:t>
+              <a:t>What do you think happens?</a:t>
             </a:r>
           </a:p>
         </p:txBody>
@@ -25085,7 +25191,7 @@
     </p:spTree>
     <p:extLst>
       <p:ext uri="{BB962C8B-B14F-4D97-AF65-F5344CB8AC3E}">
-        <p14:creationId xmlns:p14="http://schemas.microsoft.com/office/powerpoint/2010/main" val="1732645852"/>
+        <p14:creationId xmlns:p14="http://schemas.microsoft.com/office/powerpoint/2010/main" val="3478009495"/>
       </p:ext>
     </p:extLst>
   </p:cSld>
